--- a/slides/4-embeddings.pptx
+++ b/slides/4-embeddings.pptx
@@ -1620,7 +1620,7 @@
           </a:lstStyle>
           <a:p>
             <a:fld id="{3A276A98-A9C8-45C4-9495-B7E0D02675F4}" type="datetimeFigureOut">
-              <a:t>5/5/26</a:t>
+              <a:t>5/6/26</a:t>
             </a:fld>
             <a:endParaRPr lang="en-GB"/>
           </a:p>
@@ -1929,6 +1929,63 @@
         <p:txBody>
           <a:bodyPr/>
           <a:lstStyle/>
+          <a:p>
+            <a:r>
+              <a:rPr lang="en-US" dirty="0"/>
+              <a:t>[TIMINGS]</a:t>
+            </a:r>
+          </a:p>
+          <a:p>
+            <a:endParaRPr lang="en-US" dirty="0"/>
+          </a:p>
+          <a:p>
+            <a:r>
+              <a:rPr lang="en-US" dirty="0"/>
+              <a:t>Practice: 40m</a:t>
+            </a:r>
+          </a:p>
+          <a:p>
+            <a:r>
+              <a:rPr lang="en-US" dirty="0"/>
+              <a:t>Target: 45m</a:t>
+            </a:r>
+          </a:p>
+          <a:p>
+            <a:endParaRPr lang="en-US" dirty="0"/>
+          </a:p>
+          <a:p>
+            <a:r>
+              <a:rPr lang="en-US" dirty="0"/>
+              <a:t>Start time: 12:10</a:t>
+            </a:r>
+          </a:p>
+          <a:p>
+            <a:r>
+              <a:rPr lang="en-US" dirty="0"/>
+              <a:t>LUNCH: 12:30 – 13:30</a:t>
+            </a:r>
+          </a:p>
+          <a:p>
+            <a:r>
+              <a:rPr lang="en-US" dirty="0"/>
+              <a:t>End time: 13:55</a:t>
+            </a:r>
+          </a:p>
+          <a:p>
+            <a:endParaRPr lang="en-US" dirty="0"/>
+          </a:p>
+          <a:p>
+            <a:r>
+              <a:rPr lang="en-US" dirty="0"/>
+              <a:t>---</a:t>
+            </a:r>
+          </a:p>
+          <a:p>
+            <a:endParaRPr lang="en-US" dirty="0"/>
+          </a:p>
+          <a:p>
+            <a:endParaRPr lang="en-US" dirty="0"/>
+          </a:p>
           <a:p>
             <a:r>
               <a:rPr lang="en-US" dirty="0"/>
@@ -2328,6 +2385,93 @@
           <a:p>
             <a:r>
               <a:rPr lang="en-US" dirty="0"/>
+              <a:t>Typical embedding size: 750 - 1500</a:t>
+            </a:r>
+          </a:p>
+        </p:txBody>
+      </p:sp>
+      <p:sp>
+        <p:nvSpPr>
+          <p:cNvPr id="4" name="Slide Number Placeholder 3"/>
+          <p:cNvSpPr>
+            <a:spLocks noGrp="1"/>
+          </p:cNvSpPr>
+          <p:nvPr>
+            <p:ph type="sldNum" sz="quarter" idx="5"/>
+          </p:nvPr>
+        </p:nvSpPr>
+        <p:spPr/>
+        <p:txBody>
+          <a:bodyPr/>
+          <a:lstStyle/>
+          <a:p>
+            <a:fld id="{6944F51A-1069-4F0F-9839-0B9DFD816C48}" type="slidenum">
+              <a:rPr lang="en-GB" smtClean="0"/>
+              <a:t>25</a:t>
+            </a:fld>
+            <a:endParaRPr lang="en-GB"/>
+          </a:p>
+        </p:txBody>
+      </p:sp>
+    </p:spTree>
+    <p:extLst>
+      <p:ext uri="{BB962C8B-B14F-4D97-AF65-F5344CB8AC3E}">
+        <p14:creationId xmlns:p14="http://schemas.microsoft.com/office/powerpoint/2010/main" val="2237728554"/>
+      </p:ext>
+    </p:extLst>
+  </p:cSld>
+  <p:clrMapOvr>
+    <a:masterClrMapping/>
+  </p:clrMapOvr>
+</p:notes>
+</file>
+
+<file path=ppt/notesSlides/notesSlide6.xml><?xml version="1.0" encoding="utf-8"?>
+<p:notes xmlns:a="http://schemas.openxmlformats.org/drawingml/2006/main" xmlns:r="http://schemas.openxmlformats.org/officeDocument/2006/relationships" xmlns:p="http://schemas.openxmlformats.org/presentationml/2006/main">
+  <p:cSld>
+    <p:spTree>
+      <p:nvGrpSpPr>
+        <p:cNvPr id="1" name=""/>
+        <p:cNvGrpSpPr/>
+        <p:nvPr/>
+      </p:nvGrpSpPr>
+      <p:grpSpPr>
+        <a:xfrm>
+          <a:off x="0" y="0"/>
+          <a:ext cx="0" cy="0"/>
+          <a:chOff x="0" y="0"/>
+          <a:chExt cx="0" cy="0"/>
+        </a:xfrm>
+      </p:grpSpPr>
+      <p:sp>
+        <p:nvSpPr>
+          <p:cNvPr id="2" name="Slide Image Placeholder 1"/>
+          <p:cNvSpPr>
+            <a:spLocks noGrp="1" noRot="1" noChangeAspect="1"/>
+          </p:cNvSpPr>
+          <p:nvPr>
+            <p:ph type="sldImg"/>
+          </p:nvPr>
+        </p:nvSpPr>
+        <p:spPr/>
+      </p:sp>
+      <p:sp>
+        <p:nvSpPr>
+          <p:cNvPr id="3" name="Notes Placeholder 2"/>
+          <p:cNvSpPr>
+            <a:spLocks noGrp="1"/>
+          </p:cNvSpPr>
+          <p:nvPr>
+            <p:ph type="body" idx="1"/>
+          </p:nvPr>
+        </p:nvSpPr>
+        <p:spPr/>
+        <p:txBody>
+          <a:bodyPr/>
+          <a:lstStyle/>
+          <a:p>
+            <a:r>
+              <a:rPr lang="en-US" dirty="0"/>
               <a:t>We need positional embeddings as the transformer architecture does not natively encode order.</a:t>
             </a:r>
           </a:p>
@@ -2518,7 +2662,7 @@
           <a:p>
             <a:fld id="{846CE7D5-CF57-46EF-B807-FDD0502418D4}" type="datetimeFigureOut">
               <a:rPr lang="en-GB" smtClean="0"/>
-              <a:t>05/05/2026</a:t>
+              <a:t>06/05/2026</a:t>
             </a:fld>
             <a:endParaRPr lang="en-GB"/>
           </a:p>
@@ -2688,7 +2832,7 @@
           <a:p>
             <a:fld id="{846CE7D5-CF57-46EF-B807-FDD0502418D4}" type="datetimeFigureOut">
               <a:rPr lang="en-GB" smtClean="0"/>
-              <a:t>05/05/2026</a:t>
+              <a:t>06/05/2026</a:t>
             </a:fld>
             <a:endParaRPr lang="en-GB"/>
           </a:p>
@@ -2868,7 +3012,7 @@
           <a:p>
             <a:fld id="{846CE7D5-CF57-46EF-B807-FDD0502418D4}" type="datetimeFigureOut">
               <a:rPr lang="en-GB" smtClean="0"/>
-              <a:t>05/05/2026</a:t>
+              <a:t>06/05/2026</a:t>
             </a:fld>
             <a:endParaRPr lang="en-GB"/>
           </a:p>
@@ -5971,7 +6115,7 @@
           <a:p>
             <a:fld id="{846CE7D5-CF57-46EF-B807-FDD0502418D4}" type="datetimeFigureOut">
               <a:rPr lang="en-GB" smtClean="0"/>
-              <a:t>05/05/2026</a:t>
+              <a:t>06/05/2026</a:t>
             </a:fld>
             <a:endParaRPr lang="en-GB"/>
           </a:p>
@@ -6860,7 +7004,7 @@
           <a:p>
             <a:fld id="{846CE7D5-CF57-46EF-B807-FDD0502418D4}" type="datetimeFigureOut">
               <a:rPr lang="en-GB" smtClean="0"/>
-              <a:t>05/05/2026</a:t>
+              <a:t>06/05/2026</a:t>
             </a:fld>
             <a:endParaRPr lang="en-GB"/>
           </a:p>
@@ -7092,7 +7236,7 @@
           <a:p>
             <a:fld id="{846CE7D5-CF57-46EF-B807-FDD0502418D4}" type="datetimeFigureOut">
               <a:rPr lang="en-GB" smtClean="0"/>
-              <a:t>05/05/2026</a:t>
+              <a:t>06/05/2026</a:t>
             </a:fld>
             <a:endParaRPr lang="en-GB"/>
           </a:p>
@@ -7459,7 +7603,7 @@
           <a:p>
             <a:fld id="{846CE7D5-CF57-46EF-B807-FDD0502418D4}" type="datetimeFigureOut">
               <a:rPr lang="en-GB" smtClean="0"/>
-              <a:t>05/05/2026</a:t>
+              <a:t>06/05/2026</a:t>
             </a:fld>
             <a:endParaRPr lang="en-GB"/>
           </a:p>
@@ -7577,7 +7721,7 @@
           <a:p>
             <a:fld id="{846CE7D5-CF57-46EF-B807-FDD0502418D4}" type="datetimeFigureOut">
               <a:rPr lang="en-GB" smtClean="0"/>
-              <a:t>05/05/2026</a:t>
+              <a:t>06/05/2026</a:t>
             </a:fld>
             <a:endParaRPr lang="en-GB"/>
           </a:p>
@@ -7672,7 +7816,7 @@
           <a:p>
             <a:fld id="{846CE7D5-CF57-46EF-B807-FDD0502418D4}" type="datetimeFigureOut">
               <a:rPr lang="en-GB" smtClean="0"/>
-              <a:t>05/05/2026</a:t>
+              <a:t>06/05/2026</a:t>
             </a:fld>
             <a:endParaRPr lang="en-GB"/>
           </a:p>
@@ -7949,7 +8093,7 @@
           <a:p>
             <a:fld id="{846CE7D5-CF57-46EF-B807-FDD0502418D4}" type="datetimeFigureOut">
               <a:rPr lang="en-GB" smtClean="0"/>
-              <a:t>05/05/2026</a:t>
+              <a:t>06/05/2026</a:t>
             </a:fld>
             <a:endParaRPr lang="en-GB"/>
           </a:p>
@@ -8206,7 +8350,7 @@
           <a:p>
             <a:fld id="{846CE7D5-CF57-46EF-B807-FDD0502418D4}" type="datetimeFigureOut">
               <a:rPr lang="en-GB" smtClean="0"/>
-              <a:t>05/05/2026</a:t>
+              <a:t>06/05/2026</a:t>
             </a:fld>
             <a:endParaRPr lang="en-GB"/>
           </a:p>
@@ -8419,7 +8563,7 @@
           <a:p>
             <a:fld id="{846CE7D5-CF57-46EF-B807-FDD0502418D4}" type="datetimeFigureOut">
               <a:rPr lang="en-GB" smtClean="0"/>
-              <a:t>05/05/2026</a:t>
+              <a:t>06/05/2026</a:t>
             </a:fld>
             <a:endParaRPr lang="en-GB"/>
           </a:p>
@@ -31874,6 +32018,78 @@
                       </p:childTnLst>
                     </p:cTn>
                   </p:par>
+                  <p:par>
+                    <p:cTn id="17" fill="hold">
+                      <p:stCondLst>
+                        <p:cond delay="indefinite"/>
+                      </p:stCondLst>
+                      <p:childTnLst>
+                        <p:par>
+                          <p:cTn id="18" fill="hold">
+                            <p:stCondLst>
+                              <p:cond delay="0"/>
+                            </p:stCondLst>
+                            <p:childTnLst>
+                              <p:par>
+                                <p:cTn id="19" presetID="1" presetClass="entr" presetSubtype="0" fill="hold" nodeType="clickEffect">
+                                  <p:stCondLst>
+                                    <p:cond delay="0"/>
+                                  </p:stCondLst>
+                                  <p:childTnLst>
+                                    <p:set>
+                                      <p:cBhvr>
+                                        <p:cTn id="20" dur="1" fill="hold">
+                                          <p:stCondLst>
+                                            <p:cond delay="0"/>
+                                          </p:stCondLst>
+                                        </p:cTn>
+                                        <p:tgtEl>
+                                          <p:spTgt spid="6"/>
+                                        </p:tgtEl>
+                                        <p:attrNameLst>
+                                          <p:attrName>style.visibility</p:attrName>
+                                        </p:attrNameLst>
+                                      </p:cBhvr>
+                                      <p:to>
+                                        <p:strVal val="visible"/>
+                                      </p:to>
+                                    </p:set>
+                                  </p:childTnLst>
+                                </p:cTn>
+                              </p:par>
+                              <p:par>
+                                <p:cTn id="21" presetID="1" presetClass="entr" presetSubtype="0" fill="hold" grpId="0" nodeType="withEffect">
+                                  <p:stCondLst>
+                                    <p:cond delay="0"/>
+                                  </p:stCondLst>
+                                  <p:childTnLst>
+                                    <p:set>
+                                      <p:cBhvr>
+                                        <p:cTn id="22" dur="1" fill="hold">
+                                          <p:stCondLst>
+                                            <p:cond delay="0"/>
+                                          </p:stCondLst>
+                                        </p:cTn>
+                                        <p:tgtEl>
+                                          <p:spTgt spid="8"/>
+                                        </p:tgtEl>
+                                        <p:attrNameLst>
+                                          <p:attrName>style.visibility</p:attrName>
+                                        </p:attrNameLst>
+                                      </p:cBhvr>
+                                      <p:to>
+                                        <p:strVal val="visible"/>
+                                      </p:to>
+                                    </p:set>
+                                  </p:childTnLst>
+                                </p:cTn>
+                              </p:par>
+                            </p:childTnLst>
+                          </p:cTn>
+                        </p:par>
+                      </p:childTnLst>
+                    </p:cTn>
+                  </p:par>
                 </p:childTnLst>
               </p:cTn>
               <p:prevCondLst>
@@ -31897,6 +32113,7 @@
     </p:tnLst>
     <p:bldLst>
       <p:bldP spid="3" grpId="0" build="p"/>
+      <p:bldP spid="8" grpId="0"/>
     </p:bldLst>
   </p:timing>
 </p:sld>
@@ -31970,56 +32187,34 @@
           </a:bodyPr>
           <a:lstStyle/>
           <a:p>
-            <a:pPr marL="0" indent="0">
-              <a:buNone/>
-            </a:pPr>
             <a:r>
               <a:rPr lang="en-GB" dirty="0"/>
               <a:t>Why?</a:t>
             </a:r>
           </a:p>
           <a:p>
-            <a:pPr marL="0" indent="0">
-              <a:buNone/>
-            </a:pPr>
             <a:r>
               <a:rPr lang="en-GB" dirty="0"/>
-              <a:t>One-hot</a:t>
+              <a:t>One-hot encodings</a:t>
             </a:r>
           </a:p>
           <a:p>
-            <a:pPr marL="0" indent="0">
-              <a:buNone/>
-            </a:pPr>
-            <a:r>
-              <a:rPr lang="en-GB" dirty="0"/>
-              <a:t>Distributional Hypothesis</a:t>
-            </a:r>
-            <a:endParaRPr lang="en-US" dirty="0"/>
-          </a:p>
-          <a:p>
-            <a:pPr marL="0" indent="0">
-              <a:buNone/>
-            </a:pPr>
             <a:r>
               <a:rPr lang="en-GB" dirty="0"/>
               <a:t>TF-IDF</a:t>
             </a:r>
           </a:p>
           <a:p>
-            <a:pPr marL="0" indent="0">
-              <a:buNone/>
-            </a:pPr>
             <a:r>
               <a:rPr lang="en-GB" dirty="0"/>
-              <a:t>Positional Embeddings</a:t>
+              <a:t>word2vec</a:t>
             </a:r>
           </a:p>
           <a:p>
-            <a:pPr marL="0" indent="0">
-              <a:buNone/>
-            </a:pPr>
-            <a:endParaRPr lang="en-GB" dirty="0"/>
+            <a:r>
+              <a:rPr lang="en-GB" dirty="0"/>
+              <a:t>Neural embeddings</a:t>
+            </a:r>
           </a:p>
         </p:txBody>
       </p:sp>
@@ -42072,8 +42267,8 @@
           </a:ln>
         </p:spPr>
       </p:cxnSp>
-      <mc:AlternateContent xmlns:mc="http://schemas.openxmlformats.org/markup-compatibility/2006">
-        <mc:Choice xmlns:a14="http://schemas.microsoft.com/office/drawing/2010/main" Requires="a14">
+      <mc:AlternateContent xmlns:mc="http://schemas.openxmlformats.org/markup-compatibility/2006" xmlns:a14="http://schemas.microsoft.com/office/drawing/2010/main">
+        <mc:Choice Requires="a14">
           <p:sp>
             <p:nvSpPr>
               <p:cNvPr id="16" name="Google Shape;76;p14">
@@ -42435,7 +42630,7 @@
             </p:txBody>
           </p:sp>
         </mc:Choice>
-        <mc:Fallback>
+        <mc:Fallback xmlns="">
           <p:sp>
             <p:nvSpPr>
               <p:cNvPr id="16" name="Google Shape;76;p14">

--- a/slides/4-embeddings.pptx
+++ b/slides/4-embeddings.pptx
@@ -693,6 +693,122 @@
     </pc:docChg>
   </pc:docChgLst>
   <pc:docChgLst>
+    <pc:chgData name="Ryan Daniels" userId="S::rkd43@cam.ac.uk::aaa4fbe9-f474-4140-b10b-5257398ac308" providerId="AD" clId="Web-{5FB06A33-2E2E-A888-B9BF-EF47A6C86F6E}"/>
+    <pc:docChg chg="addSld delSld modSld">
+      <pc:chgData name="Ryan Daniels" userId="S::rkd43@cam.ac.uk::aaa4fbe9-f474-4140-b10b-5257398ac308" providerId="AD" clId="Web-{5FB06A33-2E2E-A888-B9BF-EF47A6C86F6E}" dt="2025-09-09T13:36:45.410" v="415"/>
+      <pc:docMkLst>
+        <pc:docMk/>
+      </pc:docMkLst>
+      <pc:sldChg chg="modSp">
+        <pc:chgData name="Ryan Daniels" userId="S::rkd43@cam.ac.uk::aaa4fbe9-f474-4140-b10b-5257398ac308" providerId="AD" clId="Web-{5FB06A33-2E2E-A888-B9BF-EF47A6C86F6E}" dt="2025-09-09T12:07:03.372" v="5" actId="20577"/>
+        <pc:sldMkLst>
+          <pc:docMk/>
+          <pc:sldMk cId="1035996628" sldId="275"/>
+        </pc:sldMkLst>
+        <pc:spChg chg="mod">
+          <ac:chgData name="Ryan Daniels" userId="S::rkd43@cam.ac.uk::aaa4fbe9-f474-4140-b10b-5257398ac308" providerId="AD" clId="Web-{5FB06A33-2E2E-A888-B9BF-EF47A6C86F6E}" dt="2025-09-09T12:07:03.372" v="5" actId="20577"/>
+          <ac:spMkLst>
+            <pc:docMk/>
+            <pc:sldMk cId="1035996628" sldId="275"/>
+            <ac:spMk id="3" creationId="{26BBA0D6-9CEE-5A43-8FE6-1F4021FBCAFD}"/>
+          </ac:spMkLst>
+        </pc:spChg>
+      </pc:sldChg>
+      <pc:sldChg chg="addSp modSp">
+        <pc:chgData name="Ryan Daniels" userId="S::rkd43@cam.ac.uk::aaa4fbe9-f474-4140-b10b-5257398ac308" providerId="AD" clId="Web-{5FB06A33-2E2E-A888-B9BF-EF47A6C86F6E}" dt="2025-09-09T13:36:41.284" v="414" actId="1076"/>
+        <pc:sldMkLst>
+          <pc:docMk/>
+          <pc:sldMk cId="2704578491" sldId="276"/>
+        </pc:sldMkLst>
+      </pc:sldChg>
+      <pc:sldChg chg="delSp del">
+        <pc:chgData name="Ryan Daniels" userId="S::rkd43@cam.ac.uk::aaa4fbe9-f474-4140-b10b-5257398ac308" providerId="AD" clId="Web-{5FB06A33-2E2E-A888-B9BF-EF47A6C86F6E}" dt="2025-09-09T13:36:45.410" v="415"/>
+        <pc:sldMkLst>
+          <pc:docMk/>
+          <pc:sldMk cId="1883872821" sldId="277"/>
+        </pc:sldMkLst>
+      </pc:sldChg>
+      <pc:sldChg chg="addSp delSp modSp new">
+        <pc:chgData name="Ryan Daniels" userId="S::rkd43@cam.ac.uk::aaa4fbe9-f474-4140-b10b-5257398ac308" providerId="AD" clId="Web-{5FB06A33-2E2E-A888-B9BF-EF47A6C86F6E}" dt="2025-09-09T12:14:34.893" v="29" actId="1076"/>
+        <pc:sldMkLst>
+          <pc:docMk/>
+          <pc:sldMk cId="3990571063" sldId="289"/>
+        </pc:sldMkLst>
+        <pc:spChg chg="mod">
+          <ac:chgData name="Ryan Daniels" userId="S::rkd43@cam.ac.uk::aaa4fbe9-f474-4140-b10b-5257398ac308" providerId="AD" clId="Web-{5FB06A33-2E2E-A888-B9BF-EF47A6C86F6E}" dt="2025-09-09T12:13:20.063" v="12" actId="20577"/>
+          <ac:spMkLst>
+            <pc:docMk/>
+            <pc:sldMk cId="3990571063" sldId="289"/>
+            <ac:spMk id="2" creationId="{6DE8872B-321F-9DAD-F0ED-568E1E6FEE20}"/>
+          </ac:spMkLst>
+        </pc:spChg>
+        <pc:spChg chg="add mod">
+          <ac:chgData name="Ryan Daniels" userId="S::rkd43@cam.ac.uk::aaa4fbe9-f474-4140-b10b-5257398ac308" providerId="AD" clId="Web-{5FB06A33-2E2E-A888-B9BF-EF47A6C86F6E}" dt="2025-09-09T12:14:34.893" v="29" actId="1076"/>
+          <ac:spMkLst>
+            <pc:docMk/>
+            <pc:sldMk cId="3990571063" sldId="289"/>
+            <ac:spMk id="6" creationId="{5B6F17E1-285D-FC02-0564-C4D597EFE081}"/>
+          </ac:spMkLst>
+        </pc:spChg>
+        <pc:picChg chg="add mod">
+          <ac:chgData name="Ryan Daniels" userId="S::rkd43@cam.ac.uk::aaa4fbe9-f474-4140-b10b-5257398ac308" providerId="AD" clId="Web-{5FB06A33-2E2E-A888-B9BF-EF47A6C86F6E}" dt="2025-09-09T12:14:19.501" v="21" actId="1076"/>
+          <ac:picMkLst>
+            <pc:docMk/>
+            <pc:sldMk cId="3990571063" sldId="289"/>
+            <ac:picMk id="5" creationId="{C29A7DFC-A7F5-DDF8-3267-659E608CB9EF}"/>
+          </ac:picMkLst>
+        </pc:picChg>
+      </pc:sldChg>
+      <pc:sldChg chg="addSp delSp modSp new">
+        <pc:chgData name="Ryan Daniels" userId="S::rkd43@cam.ac.uk::aaa4fbe9-f474-4140-b10b-5257398ac308" providerId="AD" clId="Web-{5FB06A33-2E2E-A888-B9BF-EF47A6C86F6E}" dt="2025-09-09T12:21:33.355" v="409" actId="1076"/>
+        <pc:sldMkLst>
+          <pc:docMk/>
+          <pc:sldMk cId="3927874872" sldId="290"/>
+        </pc:sldMkLst>
+        <pc:spChg chg="mod">
+          <ac:chgData name="Ryan Daniels" userId="S::rkd43@cam.ac.uk::aaa4fbe9-f474-4140-b10b-5257398ac308" providerId="AD" clId="Web-{5FB06A33-2E2E-A888-B9BF-EF47A6C86F6E}" dt="2025-09-09T12:15:40.646" v="34" actId="20577"/>
+          <ac:spMkLst>
+            <pc:docMk/>
+            <pc:sldMk cId="3927874872" sldId="290"/>
+            <ac:spMk id="2" creationId="{ADB96252-F3CA-60E3-8ABF-99A14B1C17BF}"/>
+          </ac:spMkLst>
+        </pc:spChg>
+        <pc:spChg chg="add mod">
+          <ac:chgData name="Ryan Daniels" userId="S::rkd43@cam.ac.uk::aaa4fbe9-f474-4140-b10b-5257398ac308" providerId="AD" clId="Web-{5FB06A33-2E2E-A888-B9BF-EF47A6C86F6E}" dt="2025-09-09T12:21:24.918" v="404" actId="14100"/>
+          <ac:spMkLst>
+            <pc:docMk/>
+            <pc:sldMk cId="3927874872" sldId="290"/>
+            <ac:spMk id="6" creationId="{DFBC5676-CEF5-25D8-9E2C-A75C6794EE4B}"/>
+          </ac:spMkLst>
+        </pc:spChg>
+        <pc:spChg chg="add mod">
+          <ac:chgData name="Ryan Daniels" userId="S::rkd43@cam.ac.uk::aaa4fbe9-f474-4140-b10b-5257398ac308" providerId="AD" clId="Web-{5FB06A33-2E2E-A888-B9BF-EF47A6C86F6E}" dt="2025-09-09T12:21:33.355" v="409" actId="1076"/>
+          <ac:spMkLst>
+            <pc:docMk/>
+            <pc:sldMk cId="3927874872" sldId="290"/>
+            <ac:spMk id="7" creationId="{6F9DB712-71EB-1064-40C9-4B3477EED38A}"/>
+          </ac:spMkLst>
+        </pc:spChg>
+        <pc:graphicFrameChg chg="add mod modGraphic">
+          <ac:chgData name="Ryan Daniels" userId="S::rkd43@cam.ac.uk::aaa4fbe9-f474-4140-b10b-5257398ac308" providerId="AD" clId="Web-{5FB06A33-2E2E-A888-B9BF-EF47A6C86F6E}" dt="2025-09-09T12:20:32.074" v="379" actId="1076"/>
+          <ac:graphicFrameMkLst>
+            <pc:docMk/>
+            <pc:sldMk cId="3927874872" sldId="290"/>
+            <ac:graphicFrameMk id="4" creationId="{CD91162D-9315-7F7F-17E8-9BD601A493DA}"/>
+          </ac:graphicFrameMkLst>
+        </pc:graphicFrameChg>
+        <pc:graphicFrameChg chg="add mod modGraphic">
+          <ac:chgData name="Ryan Daniels" userId="S::rkd43@cam.ac.uk::aaa4fbe9-f474-4140-b10b-5257398ac308" providerId="AD" clId="Web-{5FB06A33-2E2E-A888-B9BF-EF47A6C86F6E}" dt="2025-09-09T12:20:37.730" v="380" actId="1076"/>
+          <ac:graphicFrameMkLst>
+            <pc:docMk/>
+            <pc:sldMk cId="3927874872" sldId="290"/>
+            <ac:graphicFrameMk id="5" creationId="{16A0A5D4-9CFB-BF19-B7E4-6925ACF1C489}"/>
+          </ac:graphicFrameMkLst>
+        </pc:graphicFrameChg>
+      </pc:sldChg>
+    </pc:docChg>
+  </pc:docChgLst>
+  <pc:docChgLst>
     <pc:chgData name="Ryan Daniels" userId="S::rkd43@cam.ac.uk::aaa4fbe9-f474-4140-b10b-5257398ac308" providerId="AD" clId="Web-{C6910A1E-EBE7-FFC2-D63D-F23023DD8B7A}"/>
     <pc:docChg chg="addSld delSld modSld addMainMaster">
       <pc:chgData name="Ryan Daniels" userId="S::rkd43@cam.ac.uk::aaa4fbe9-f474-4140-b10b-5257398ac308" providerId="AD" clId="Web-{C6910A1E-EBE7-FFC2-D63D-F23023DD8B7A}" dt="2025-09-05T12:54:05.596" v="409"/>
@@ -1378,122 +1494,6 @@
           </pc:sldLayoutMkLst>
         </pc:sldLayoutChg>
       </pc:sldMasterChg>
-    </pc:docChg>
-  </pc:docChgLst>
-  <pc:docChgLst>
-    <pc:chgData name="Ryan Daniels" userId="S::rkd43@cam.ac.uk::aaa4fbe9-f474-4140-b10b-5257398ac308" providerId="AD" clId="Web-{5FB06A33-2E2E-A888-B9BF-EF47A6C86F6E}"/>
-    <pc:docChg chg="addSld delSld modSld">
-      <pc:chgData name="Ryan Daniels" userId="S::rkd43@cam.ac.uk::aaa4fbe9-f474-4140-b10b-5257398ac308" providerId="AD" clId="Web-{5FB06A33-2E2E-A888-B9BF-EF47A6C86F6E}" dt="2025-09-09T13:36:45.410" v="415"/>
-      <pc:docMkLst>
-        <pc:docMk/>
-      </pc:docMkLst>
-      <pc:sldChg chg="modSp">
-        <pc:chgData name="Ryan Daniels" userId="S::rkd43@cam.ac.uk::aaa4fbe9-f474-4140-b10b-5257398ac308" providerId="AD" clId="Web-{5FB06A33-2E2E-A888-B9BF-EF47A6C86F6E}" dt="2025-09-09T12:07:03.372" v="5" actId="20577"/>
-        <pc:sldMkLst>
-          <pc:docMk/>
-          <pc:sldMk cId="1035996628" sldId="275"/>
-        </pc:sldMkLst>
-        <pc:spChg chg="mod">
-          <ac:chgData name="Ryan Daniels" userId="S::rkd43@cam.ac.uk::aaa4fbe9-f474-4140-b10b-5257398ac308" providerId="AD" clId="Web-{5FB06A33-2E2E-A888-B9BF-EF47A6C86F6E}" dt="2025-09-09T12:07:03.372" v="5" actId="20577"/>
-          <ac:spMkLst>
-            <pc:docMk/>
-            <pc:sldMk cId="1035996628" sldId="275"/>
-            <ac:spMk id="3" creationId="{26BBA0D6-9CEE-5A43-8FE6-1F4021FBCAFD}"/>
-          </ac:spMkLst>
-        </pc:spChg>
-      </pc:sldChg>
-      <pc:sldChg chg="addSp modSp">
-        <pc:chgData name="Ryan Daniels" userId="S::rkd43@cam.ac.uk::aaa4fbe9-f474-4140-b10b-5257398ac308" providerId="AD" clId="Web-{5FB06A33-2E2E-A888-B9BF-EF47A6C86F6E}" dt="2025-09-09T13:36:41.284" v="414" actId="1076"/>
-        <pc:sldMkLst>
-          <pc:docMk/>
-          <pc:sldMk cId="2704578491" sldId="276"/>
-        </pc:sldMkLst>
-      </pc:sldChg>
-      <pc:sldChg chg="delSp del">
-        <pc:chgData name="Ryan Daniels" userId="S::rkd43@cam.ac.uk::aaa4fbe9-f474-4140-b10b-5257398ac308" providerId="AD" clId="Web-{5FB06A33-2E2E-A888-B9BF-EF47A6C86F6E}" dt="2025-09-09T13:36:45.410" v="415"/>
-        <pc:sldMkLst>
-          <pc:docMk/>
-          <pc:sldMk cId="1883872821" sldId="277"/>
-        </pc:sldMkLst>
-      </pc:sldChg>
-      <pc:sldChg chg="addSp delSp modSp new">
-        <pc:chgData name="Ryan Daniels" userId="S::rkd43@cam.ac.uk::aaa4fbe9-f474-4140-b10b-5257398ac308" providerId="AD" clId="Web-{5FB06A33-2E2E-A888-B9BF-EF47A6C86F6E}" dt="2025-09-09T12:14:34.893" v="29" actId="1076"/>
-        <pc:sldMkLst>
-          <pc:docMk/>
-          <pc:sldMk cId="3990571063" sldId="289"/>
-        </pc:sldMkLst>
-        <pc:spChg chg="mod">
-          <ac:chgData name="Ryan Daniels" userId="S::rkd43@cam.ac.uk::aaa4fbe9-f474-4140-b10b-5257398ac308" providerId="AD" clId="Web-{5FB06A33-2E2E-A888-B9BF-EF47A6C86F6E}" dt="2025-09-09T12:13:20.063" v="12" actId="20577"/>
-          <ac:spMkLst>
-            <pc:docMk/>
-            <pc:sldMk cId="3990571063" sldId="289"/>
-            <ac:spMk id="2" creationId="{6DE8872B-321F-9DAD-F0ED-568E1E6FEE20}"/>
-          </ac:spMkLst>
-        </pc:spChg>
-        <pc:spChg chg="add mod">
-          <ac:chgData name="Ryan Daniels" userId="S::rkd43@cam.ac.uk::aaa4fbe9-f474-4140-b10b-5257398ac308" providerId="AD" clId="Web-{5FB06A33-2E2E-A888-B9BF-EF47A6C86F6E}" dt="2025-09-09T12:14:34.893" v="29" actId="1076"/>
-          <ac:spMkLst>
-            <pc:docMk/>
-            <pc:sldMk cId="3990571063" sldId="289"/>
-            <ac:spMk id="6" creationId="{5B6F17E1-285D-FC02-0564-C4D597EFE081}"/>
-          </ac:spMkLst>
-        </pc:spChg>
-        <pc:picChg chg="add mod">
-          <ac:chgData name="Ryan Daniels" userId="S::rkd43@cam.ac.uk::aaa4fbe9-f474-4140-b10b-5257398ac308" providerId="AD" clId="Web-{5FB06A33-2E2E-A888-B9BF-EF47A6C86F6E}" dt="2025-09-09T12:14:19.501" v="21" actId="1076"/>
-          <ac:picMkLst>
-            <pc:docMk/>
-            <pc:sldMk cId="3990571063" sldId="289"/>
-            <ac:picMk id="5" creationId="{C29A7DFC-A7F5-DDF8-3267-659E608CB9EF}"/>
-          </ac:picMkLst>
-        </pc:picChg>
-      </pc:sldChg>
-      <pc:sldChg chg="addSp delSp modSp new">
-        <pc:chgData name="Ryan Daniels" userId="S::rkd43@cam.ac.uk::aaa4fbe9-f474-4140-b10b-5257398ac308" providerId="AD" clId="Web-{5FB06A33-2E2E-A888-B9BF-EF47A6C86F6E}" dt="2025-09-09T12:21:33.355" v="409" actId="1076"/>
-        <pc:sldMkLst>
-          <pc:docMk/>
-          <pc:sldMk cId="3927874872" sldId="290"/>
-        </pc:sldMkLst>
-        <pc:spChg chg="mod">
-          <ac:chgData name="Ryan Daniels" userId="S::rkd43@cam.ac.uk::aaa4fbe9-f474-4140-b10b-5257398ac308" providerId="AD" clId="Web-{5FB06A33-2E2E-A888-B9BF-EF47A6C86F6E}" dt="2025-09-09T12:15:40.646" v="34" actId="20577"/>
-          <ac:spMkLst>
-            <pc:docMk/>
-            <pc:sldMk cId="3927874872" sldId="290"/>
-            <ac:spMk id="2" creationId="{ADB96252-F3CA-60E3-8ABF-99A14B1C17BF}"/>
-          </ac:spMkLst>
-        </pc:spChg>
-        <pc:spChg chg="add mod">
-          <ac:chgData name="Ryan Daniels" userId="S::rkd43@cam.ac.uk::aaa4fbe9-f474-4140-b10b-5257398ac308" providerId="AD" clId="Web-{5FB06A33-2E2E-A888-B9BF-EF47A6C86F6E}" dt="2025-09-09T12:21:24.918" v="404" actId="14100"/>
-          <ac:spMkLst>
-            <pc:docMk/>
-            <pc:sldMk cId="3927874872" sldId="290"/>
-            <ac:spMk id="6" creationId="{DFBC5676-CEF5-25D8-9E2C-A75C6794EE4B}"/>
-          </ac:spMkLst>
-        </pc:spChg>
-        <pc:spChg chg="add mod">
-          <ac:chgData name="Ryan Daniels" userId="S::rkd43@cam.ac.uk::aaa4fbe9-f474-4140-b10b-5257398ac308" providerId="AD" clId="Web-{5FB06A33-2E2E-A888-B9BF-EF47A6C86F6E}" dt="2025-09-09T12:21:33.355" v="409" actId="1076"/>
-          <ac:spMkLst>
-            <pc:docMk/>
-            <pc:sldMk cId="3927874872" sldId="290"/>
-            <ac:spMk id="7" creationId="{6F9DB712-71EB-1064-40C9-4B3477EED38A}"/>
-          </ac:spMkLst>
-        </pc:spChg>
-        <pc:graphicFrameChg chg="add mod modGraphic">
-          <ac:chgData name="Ryan Daniels" userId="S::rkd43@cam.ac.uk::aaa4fbe9-f474-4140-b10b-5257398ac308" providerId="AD" clId="Web-{5FB06A33-2E2E-A888-B9BF-EF47A6C86F6E}" dt="2025-09-09T12:20:32.074" v="379" actId="1076"/>
-          <ac:graphicFrameMkLst>
-            <pc:docMk/>
-            <pc:sldMk cId="3927874872" sldId="290"/>
-            <ac:graphicFrameMk id="4" creationId="{CD91162D-9315-7F7F-17E8-9BD601A493DA}"/>
-          </ac:graphicFrameMkLst>
-        </pc:graphicFrameChg>
-        <pc:graphicFrameChg chg="add mod modGraphic">
-          <ac:chgData name="Ryan Daniels" userId="S::rkd43@cam.ac.uk::aaa4fbe9-f474-4140-b10b-5257398ac308" providerId="AD" clId="Web-{5FB06A33-2E2E-A888-B9BF-EF47A6C86F6E}" dt="2025-09-09T12:20:37.730" v="380" actId="1076"/>
-          <ac:graphicFrameMkLst>
-            <pc:docMk/>
-            <pc:sldMk cId="3927874872" sldId="290"/>
-            <ac:graphicFrameMk id="5" creationId="{16A0A5D4-9CFB-BF19-B7E4-6925ACF1C489}"/>
-          </ac:graphicFrameMkLst>
-        </pc:graphicFrameChg>
-      </pc:sldChg>
     </pc:docChg>
   </pc:docChgLst>
   <pc:docChgLst>
